--- a/dist/초6/사회·역사/현대사회와평화/초6_사회·역사_현대사회와평화_03_분단과평화통일_학생용.pptx
+++ b/dist/초6/사회·역사/현대사회와평화/초6_사회·역사_현대사회와평화_03_분단과평화통일_학생용.pptx
@@ -121,13 +121,13 @@
   <p:extLst>
     <p:ext uri="{521415D9-36F7-43E2-AB2F-B90AF26B5E84}">
       <p14:sectionLst xmlns:p14="http://schemas.microsoft.com/office/powerpoint/2010/main">
-        <p14:section name="도입" id="{a2ed58ab-c8b7-38f1-1b06-aa5c2f8addb0}">
+        <p14:section name="도입" id="{9aaeac57-0112-afd9-d4fa-26d70a062af9}">
           <p14:sldIdLst>
             <p14:sldId id="256"/>
             <p14:sldId id="257"/>
           </p14:sldIdLst>
         </p14:section>
-        <p14:section name="개념" id="{6ba444d7-9daa-bada-c5d4-4b6e4276750e}">
+        <p14:section name="개념" id="{cb259df3-30d5-b43f-b631-46c3ea0f0766}">
           <p14:sldIdLst>
             <p14:sldId id="258"/>
             <p14:sldId id="259"/>
@@ -136,7 +136,7 @@
             <p14:sldId id="265"/>
           </p14:sldIdLst>
         </p14:section>
-        <p14:section name="연습" id="{94ac1204-4e35-799b-8323-368253d61915}">
+        <p14:section name="연습" id="{e88bf95e-0914-a810-8e3c-5e88edf9d818}">
           <p14:sldIdLst>
             <p14:sldId id="261"/>
             <p14:sldId id="262"/>
@@ -145,29 +145,29 @@
             <p14:sldId id="267"/>
           </p14:sldIdLst>
         </p14:section>
-        <p14:section name="개념" id="{7a3f8f7a-97aa-8c8b-a471-9e23b72c5c25}">
+        <p14:section name="개념" id="{b00fce60-86a6-3d9c-bbe7-cf04222f8db5}">
           <p14:sldIdLst/>
         </p14:section>
-        <p14:section name="연습" id="{1cf2828e-6cf7-851f-c04b-93dcf077bb8d}">
+        <p14:section name="연습" id="{0edbf0df-3536-e526-9650-7ad9bc79fa29}">
           <p14:sldIdLst/>
         </p14:section>
-        <p14:section name="개념" id="{1ecc7c2f-2769-29e0-519f-37ff057b7066}">
+        <p14:section name="개념" id="{63352062-5361-07fa-fd97-e99143c2b1c6}">
           <p14:sldIdLst/>
         </p14:section>
-        <p14:section name="연습" id="{4b2766e5-fefc-30c4-d64a-510e05c9fbc3}">
+        <p14:section name="연습" id="{f3294b08-2207-af24-62b4-4b214e9b3da8}">
           <p14:sldIdLst/>
         </p14:section>
-        <p14:section name="확인" id="{fe046ea6-1f10-34e5-d036-d590f6a6a874}">
+        <p14:section name="확인" id="{572a037b-092c-8f53-312d-0bb884ec7d1b}">
           <p14:sldIdLst>
             <p14:sldId id="268"/>
           </p14:sldIdLst>
         </p14:section>
-        <p14:section name="정리" id="{0764d3ce-fc42-bea4-014d-5ea196797cf2}">
+        <p14:section name="정리" id="{db5fa4be-bcaf-c48f-8309-a69dc9dcd763}">
           <p14:sldIdLst>
             <p14:sldId id="269"/>
           </p14:sldIdLst>
         </p14:section>
-        <p14:section name="보충" id="{531416c2-43a9-2a2a-9aa1-4671ca05d1a5}">
+        <p14:section name="보충" id="{7f791fc3-7573-5874-4c4c-728d5595c8c2}">
           <p14:sldIdLst>
             <p14:sldId id="270"/>
           </p14:sldIdLst>
